--- a/additional_8tags/ppt_summary/additional_8tags_분석결과_발표자료.pptx
+++ b/additional_8tags/ppt_summary/additional_8tags_분석결과_발표자료.pptx
@@ -11500,7 +11500,7 @@
         <p:spPr>
           <a:xfrm>
             <a:off x="457200" y="1097280"/>
-            <a:ext cx="10972800" cy="5463387"/>
+            <a:ext cx="10972800" cy="5493342"/>
           </a:xfrm>
           <a:prstGeom prst="rect">
             <a:avLst/>
